--- a/presentation/Luftqualität-Europa-BDENG.pptx
+++ b/presentation/Luftqualität-Europa-BDENG.pptx
@@ -1633,45 +1633,67 @@
                 <a:ea typeface="JetBrains Mono" pitchFamily="34" charset="-122"/>
                 <a:cs typeface="JetBrains Mono" pitchFamily="34" charset="-120"/>
               </a:rPr>
-              <a:t>Big-Data-Engineering · Juni 2026</a:t>
-            </a:r>
-            <a:endParaRPr lang="en-US" sz="1200" dirty="0"/>
-          </a:p>
-        </p:txBody>
-      </p:sp>
-      <p:sp>
-        <p:nvSpPr>
-          <p:cNvPr id="7" name="Text 3"/>
-          <p:cNvSpPr txBox="1"/>
-          <p:nvPr/>
-        </p:nvSpPr>
-        <p:spPr>
-          <a:xfrm>
-            <a:off x="1143000" y="4000500"/>
-            <a:ext cx="11430000" cy="247802"/>
-          </a:xfrm>
-          <a:prstGeom prst="rect">
-            <a:avLst/>
-          </a:prstGeom>
-          <a:noFill/>
-          <a:ln/>
-        </p:spPr>
-        <p:txBody>
-          <a:bodyPr wrap="none" lIns="0" tIns="0" rIns="0" bIns="0" rtlCol="0" anchor="ctr"/>
-          <a:lstStyle/>
-          <a:p>
-            <a:pPr marL="0" indent="0" algn="l">
-              <a:buNone/>
-            </a:pPr>
-            <a:r>
-              <a:rPr lang="en-US" sz="1500" kern="0" spc="450" dirty="0">
-                <a:solidFill>
-                  <a:srgbClr val="00649C"/>
+              <a:t>Big-Data-Engineering · </a:t>
+            </a:r>
+            <a:r>
+              <a:rPr lang="en-US" sz="1200" kern="0" spc="240" dirty="0" err="1">
+                <a:solidFill>
+                  <a:srgbClr val="6B6B6B"/>
                 </a:solidFill>
                 <a:latin typeface="JetBrains Mono" pitchFamily="34" charset="0"/>
                 <a:ea typeface="JetBrains Mono" pitchFamily="34" charset="-122"/>
                 <a:cs typeface="JetBrains Mono" pitchFamily="34" charset="-120"/>
               </a:rPr>
+              <a:t>Juli</a:t>
+            </a:r>
+            <a:r>
+              <a:rPr lang="en-US" sz="1200" kern="0" spc="240" dirty="0">
+                <a:solidFill>
+                  <a:srgbClr val="6B6B6B"/>
+                </a:solidFill>
+                <a:latin typeface="JetBrains Mono" pitchFamily="34" charset="0"/>
+                <a:ea typeface="JetBrains Mono" pitchFamily="34" charset="-122"/>
+                <a:cs typeface="JetBrains Mono" pitchFamily="34" charset="-120"/>
+              </a:rPr>
+              <a:t> 2026</a:t>
+            </a:r>
+            <a:endParaRPr lang="en-US" sz="1200" dirty="0"/>
+          </a:p>
+        </p:txBody>
+      </p:sp>
+      <p:sp>
+        <p:nvSpPr>
+          <p:cNvPr id="7" name="Text 3"/>
+          <p:cNvSpPr txBox="1"/>
+          <p:nvPr/>
+        </p:nvSpPr>
+        <p:spPr>
+          <a:xfrm>
+            <a:off x="1143000" y="4000500"/>
+            <a:ext cx="11430000" cy="247802"/>
+          </a:xfrm>
+          <a:prstGeom prst="rect">
+            <a:avLst/>
+          </a:prstGeom>
+          <a:noFill/>
+          <a:ln/>
+        </p:spPr>
+        <p:txBody>
+          <a:bodyPr wrap="none" lIns="0" tIns="0" rIns="0" bIns="0" rtlCol="0" anchor="ctr"/>
+          <a:lstStyle/>
+          <a:p>
+            <a:pPr marL="0" indent="0" algn="l">
+              <a:buNone/>
+            </a:pPr>
+            <a:r>
+              <a:rPr lang="en-US" sz="1500" kern="0" spc="450" dirty="0">
+                <a:solidFill>
+                  <a:srgbClr val="00649C"/>
+                </a:solidFill>
+                <a:latin typeface="JetBrains Mono" pitchFamily="34" charset="0"/>
+                <a:ea typeface="JetBrains Mono" pitchFamily="34" charset="-122"/>
+                <a:cs typeface="JetBrains Mono" pitchFamily="34" charset="-120"/>
+              </a:rPr>
               <a:t>Abschlusspräsentation · Findings</a:t>
             </a:r>
             <a:endParaRPr lang="en-US" sz="1500" dirty="0"/>
@@ -1915,72 +1937,78 @@
               <a:buNone/>
             </a:pPr>
             <a:r>
-              <a:rPr lang="en-US" sz="1300" b="1" dirty="0" err="1">
+              <a:rPr lang="en-GB" sz="1400" b="1" i="0" dirty="0" err="1">
+                <a:solidFill>
+                  <a:srgbClr val="000000"/>
+                </a:solidFill>
+                <a:effectLst/>
+                <a:latin typeface="-apple-system"/>
+              </a:rPr>
+              <a:t>Yesillik</a:t>
+            </a:r>
+            <a:r>
+              <a:rPr lang="en-GB" sz="1400" b="1" i="0" dirty="0">
+                <a:solidFill>
+                  <a:srgbClr val="000000"/>
+                </a:solidFill>
+                <a:effectLst/>
+                <a:latin typeface="-apple-system"/>
+              </a:rPr>
+              <a:t> </a:t>
+            </a:r>
+            <a:r>
+              <a:rPr lang="en-GB" sz="1400" b="1" i="0" dirty="0" err="1">
+                <a:solidFill>
+                  <a:srgbClr val="000000"/>
+                </a:solidFill>
+                <a:effectLst/>
+                <a:latin typeface="-apple-system"/>
+              </a:rPr>
+              <a:t>Nisa</a:t>
+            </a:r>
+            <a:r>
+              <a:rPr lang="en-US" sz="1400" b="1" i="0" dirty="0">
                 <a:solidFill>
                   <a:srgbClr val="1A1A1A"/>
                 </a:solidFill>
+                <a:effectLst/>
                 <a:latin typeface="Inter Tight" pitchFamily="34" charset="0"/>
                 <a:ea typeface="Inter Tight" pitchFamily="34" charset="-122"/>
-                <a:cs typeface="Inter Tight" pitchFamily="34" charset="-120"/>
-              </a:rPr>
-              <a:t>Nisa</a:t>
-            </a:r>
-            <a:r>
-              <a:rPr lang="en-US" sz="1300" b="1" dirty="0">
+              </a:rPr>
+              <a:t> - </a:t>
+            </a:r>
+            <a:r>
+              <a:rPr lang="en-GB" sz="1400" b="1" i="0" dirty="0" err="1">
+                <a:solidFill>
+                  <a:srgbClr val="000000"/>
+                </a:solidFill>
+                <a:effectLst/>
+                <a:latin typeface="-apple-system"/>
+              </a:rPr>
+              <a:t>Bandat</a:t>
+            </a:r>
+            <a:r>
+              <a:rPr lang="en-GB" sz="1400" b="1" i="0" dirty="0">
+                <a:solidFill>
+                  <a:srgbClr val="000000"/>
+                </a:solidFill>
+                <a:effectLst/>
+                <a:latin typeface="-apple-system"/>
+              </a:rPr>
+              <a:t> Manuel</a:t>
+            </a:r>
+            <a:r>
+              <a:rPr lang="en-US" sz="1400" b="1" i="0" dirty="0">
                 <a:solidFill>
                   <a:srgbClr val="1A1A1A"/>
                 </a:solidFill>
+                <a:effectLst/>
                 <a:latin typeface="Inter Tight" pitchFamily="34" charset="0"/>
                 <a:ea typeface="Inter Tight" pitchFamily="34" charset="-122"/>
-                <a:cs typeface="Inter Tight" pitchFamily="34" charset="-120"/>
-              </a:rPr>
-              <a:t> </a:t>
-            </a:r>
-            <a:r>
-              <a:rPr lang="en-US" sz="1300" b="1" dirty="0" err="1">
-                <a:solidFill>
-                  <a:srgbClr val="1A1A1A"/>
-                </a:solidFill>
-                <a:latin typeface="Inter Tight" pitchFamily="34" charset="0"/>
-                <a:ea typeface="Inter Tight" pitchFamily="34" charset="-122"/>
-                <a:cs typeface="Inter Tight" pitchFamily="34" charset="-120"/>
-              </a:rPr>
-              <a:t>Yesilik</a:t>
-            </a:r>
-            <a:r>
-              <a:rPr lang="en-US" sz="1300" b="1" dirty="0">
-                <a:solidFill>
-                  <a:srgbClr val="1A1A1A"/>
-                </a:solidFill>
-                <a:latin typeface="Inter Tight" pitchFamily="34" charset="0"/>
-                <a:ea typeface="Inter Tight" pitchFamily="34" charset="-122"/>
-                <a:cs typeface="Inter Tight" pitchFamily="34" charset="-120"/>
-              </a:rPr>
-              <a:t> – Manuel </a:t>
-            </a:r>
-            <a:r>
-              <a:rPr lang="en-US" sz="1300" b="1" dirty="0" err="1">
-                <a:solidFill>
-                  <a:srgbClr val="1A1A1A"/>
-                </a:solidFill>
-                <a:latin typeface="Inter Tight" pitchFamily="34" charset="0"/>
-                <a:ea typeface="Inter Tight" pitchFamily="34" charset="-122"/>
-                <a:cs typeface="Inter Tight" pitchFamily="34" charset="-120"/>
-              </a:rPr>
-              <a:t>Bandant</a:t>
-            </a:r>
-            <a:r>
-              <a:rPr lang="en-US" sz="1300" b="1" dirty="0">
-                <a:solidFill>
-                  <a:srgbClr val="1A1A1A"/>
-                </a:solidFill>
-                <a:latin typeface="Inter Tight" pitchFamily="34" charset="0"/>
-                <a:ea typeface="Inter Tight" pitchFamily="34" charset="-122"/>
-                <a:cs typeface="Inter Tight" pitchFamily="34" charset="-120"/>
-              </a:rPr>
-              <a:t> – Georg Wiesmüller</a:t>
-            </a:r>
-            <a:endParaRPr lang="en-US" sz="1300" dirty="0"/>
+              </a:rPr>
+              <a:t> – Wiesmüller Georg</a:t>
+            </a:r>
+            <a:endParaRPr lang="en-US" sz="1400" b="1" dirty="0"/>
           </a:p>
         </p:txBody>
       </p:sp>
@@ -3898,7 +3926,7 @@
         </p:nvSpPr>
         <p:spPr>
           <a:xfrm>
-            <a:off x="1143000" y="9525305"/>
+            <a:off x="1143000" y="9506103"/>
             <a:ext cx="8572500" cy="228600"/>
           </a:xfrm>
           <a:prstGeom prst="rect">
@@ -3915,17 +3943,78 @@
               <a:buNone/>
             </a:pPr>
             <a:r>
-              <a:rPr lang="en-US" sz="1500" b="1" dirty="0">
+              <a:rPr lang="en-GB" sz="1600" b="1" i="0" dirty="0" err="1">
+                <a:solidFill>
+                  <a:srgbClr val="000000"/>
+                </a:solidFill>
+                <a:effectLst/>
+                <a:latin typeface="-apple-system"/>
+              </a:rPr>
+              <a:t>Yesillik</a:t>
+            </a:r>
+            <a:r>
+              <a:rPr lang="en-GB" sz="1600" b="1" i="0" dirty="0">
+                <a:solidFill>
+                  <a:srgbClr val="000000"/>
+                </a:solidFill>
+                <a:effectLst/>
+                <a:latin typeface="-apple-system"/>
+              </a:rPr>
+              <a:t> </a:t>
+            </a:r>
+            <a:r>
+              <a:rPr lang="en-GB" sz="1600" b="1" i="0" dirty="0" err="1">
+                <a:solidFill>
+                  <a:srgbClr val="000000"/>
+                </a:solidFill>
+                <a:effectLst/>
+                <a:latin typeface="-apple-system"/>
+              </a:rPr>
+              <a:t>Nisa</a:t>
+            </a:r>
+            <a:r>
+              <a:rPr lang="en-US" sz="1500" b="1" i="0" dirty="0">
                 <a:solidFill>
                   <a:srgbClr val="1A1A1A"/>
                 </a:solidFill>
+                <a:effectLst/>
                 <a:latin typeface="Inter Tight" pitchFamily="34" charset="0"/>
                 <a:ea typeface="Inter Tight" pitchFamily="34" charset="-122"/>
-                <a:cs typeface="Inter Tight" pitchFamily="34" charset="-120"/>
-              </a:rPr>
-              <a:t>[Name 1] · [Name 2] · [Name 3]</a:t>
-            </a:r>
-            <a:endParaRPr lang="en-US" sz="1500" dirty="0"/>
+              </a:rPr>
+              <a:t> - </a:t>
+            </a:r>
+            <a:r>
+              <a:rPr lang="en-GB" sz="1600" b="1" i="0" dirty="0" err="1">
+                <a:solidFill>
+                  <a:srgbClr val="000000"/>
+                </a:solidFill>
+                <a:effectLst/>
+                <a:latin typeface="-apple-system"/>
+              </a:rPr>
+              <a:t>Bandat</a:t>
+            </a:r>
+            <a:r>
+              <a:rPr lang="en-GB" sz="1600" b="1" i="0" dirty="0">
+                <a:solidFill>
+                  <a:srgbClr val="000000"/>
+                </a:solidFill>
+                <a:effectLst/>
+                <a:latin typeface="-apple-system"/>
+              </a:rPr>
+              <a:t> Manuel</a:t>
+            </a:r>
+            <a:r>
+              <a:rPr lang="en-US" sz="1500" b="1" i="0" dirty="0">
+                <a:solidFill>
+                  <a:srgbClr val="1A1A1A"/>
+                </a:solidFill>
+                <a:effectLst/>
+                <a:latin typeface="Inter Tight" pitchFamily="34" charset="0"/>
+                <a:ea typeface="Inter Tight" pitchFamily="34" charset="-122"/>
+              </a:rPr>
+              <a:t> – Wiesmüller Georg</a:t>
+            </a:r>
+            <a:endParaRPr lang="en-US" sz="1500" b="1" dirty="0"/>
           </a:p>
         </p:txBody>
       </p:sp>

--- a/presentation/Luftqualität-Europa-BDENG.pptx
+++ b/presentation/Luftqualität-Europa-BDENG.pptx
@@ -1633,7 +1633,7 @@
                 <a:ea typeface="JetBrains Mono" pitchFamily="34" charset="-122"/>
                 <a:cs typeface="JetBrains Mono" pitchFamily="34" charset="-120"/>
               </a:rPr>
-              <a:t>Big-Data-Engineering · </a:t>
+              <a:t xml:space="preserve">Big-Data-Engineering · </a:t>
             </a:r>
             <a:r>
               <a:rPr lang="en-US" sz="1200" kern="0" spc="240" dirty="0" err="1">
@@ -1655,7 +1655,7 @@
                 <a:ea typeface="JetBrains Mono" pitchFamily="34" charset="-122"/>
                 <a:cs typeface="JetBrains Mono" pitchFamily="34" charset="-120"/>
               </a:rPr>
-              <a:t> 2026</a:t>
+              <a:t xml:space="preserve"> 2026</a:t>
             </a:r>
             <a:endParaRPr lang="en-US" sz="1200" dirty="0"/>
           </a:p>
@@ -1954,7 +1954,7 @@
                 <a:effectLst/>
                 <a:latin typeface="-apple-system"/>
               </a:rPr>
-              <a:t> </a:t>
+              <a:t xml:space="preserve"> </a:t>
             </a:r>
             <a:r>
               <a:rPr lang="en-GB" sz="1400" b="1" i="0" dirty="0" err="1">
@@ -1975,7 +1975,7 @@
                 <a:latin typeface="Inter Tight" pitchFamily="34" charset="0"/>
                 <a:ea typeface="Inter Tight" pitchFamily="34" charset="-122"/>
               </a:rPr>
-              <a:t> - </a:t>
+              <a:t xml:space="preserve"> - </a:t>
             </a:r>
             <a:r>
               <a:rPr lang="en-GB" sz="1400" b="1" i="0" dirty="0" err="1">
@@ -1995,7 +1995,7 @@
                 <a:effectLst/>
                 <a:latin typeface="-apple-system"/>
               </a:rPr>
-              <a:t> Manuel</a:t>
+              <a:t xml:space="preserve"> Manuel</a:t>
             </a:r>
             <a:r>
               <a:rPr lang="en-US" sz="1400" b="1" i="0" dirty="0">
@@ -2006,7 +2006,7 @@
                 <a:latin typeface="Inter Tight" pitchFamily="34" charset="0"/>
                 <a:ea typeface="Inter Tight" pitchFamily="34" charset="-122"/>
               </a:rPr>
-              <a:t> – Wiesmüller Georg</a:t>
+              <a:t xml:space="preserve"> – Wiesmüller Georg</a:t>
             </a:r>
             <a:endParaRPr lang="en-US" sz="1400" b="1" dirty="0"/>
           </a:p>
@@ -2395,7 +2395,7 @@
                 <a:ea typeface="Source Serif 4" pitchFamily="34" charset="-122"/>
                 <a:cs typeface="Source Serif 4" pitchFamily="34" charset="-120"/>
               </a:rPr>
-              <a:t>Was die Daten </a:t>
+              <a:t xml:space="preserve">Was die Daten </a:t>
             </a:r>
             <a:r>
               <a:rPr lang="en-US" sz="6000" b="1" i="1" kern="0" spc="-90" dirty="0">
@@ -2417,7 +2417,7 @@
                 <a:ea typeface="Source Serif 4" pitchFamily="34" charset="-122"/>
                 <a:cs typeface="Source Serif 4" pitchFamily="34" charset="-120"/>
               </a:rPr>
-              <a:t> sagen.</a:t>
+              <a:t xml:space="preserve"> sagen.</a:t>
             </a:r>
             <a:endParaRPr lang="en-US" sz="6000" dirty="0"/>
           </a:p>
@@ -2573,7 +2573,7 @@
                 <a:ea typeface="Source Serif 4" pitchFamily="34" charset="-122"/>
                 <a:cs typeface="Source Serif 4" pitchFamily="34" charset="-120"/>
               </a:rPr>
-              <a:t>Wir beschreiben </a:t>
+              <a:t xml:space="preserve">Wir beschreiben </a:t>
             </a:r>
             <a:r>
               <a:rPr lang="en-US" sz="2200" b="1" dirty="0">
@@ -2595,7 +2595,7 @@
                 <a:ea typeface="Source Serif 4" pitchFamily="34" charset="-122"/>
                 <a:cs typeface="Source Serif 4" pitchFamily="34" charset="-120"/>
               </a:rPr>
-              <a:t>, behaupten aber </a:t>
+              <a:t xml:space="preserve">, behaupten aber </a:t>
             </a:r>
             <a:r>
               <a:rPr lang="en-US" sz="2200" b="1" dirty="0">
@@ -2734,7 +2734,7 @@
                 <a:ea typeface="Source Serif 4" pitchFamily="34" charset="-122"/>
                 <a:cs typeface="Source Serif 4" pitchFamily="34" charset="-120"/>
               </a:rPr>
-              <a:t>Jeder Schadstoff wird </a:t>
+              <a:t xml:space="preserve">Jeder Schadstoff wird </a:t>
             </a:r>
             <a:r>
               <a:rPr lang="en-US" sz="2200" b="1" dirty="0">
@@ -2756,7 +2756,7 @@
                 <a:ea typeface="Source Serif 4" pitchFamily="34" charset="-122"/>
                 <a:cs typeface="Source Serif 4" pitchFamily="34" charset="-120"/>
               </a:rPr>
-              <a:t> betrachtet — die Rangfolge ist schadstoffabhängig.</a:t>
+              <a:t xml:space="preserve"> betrachtet — die Rangfolge ist schadstoffabhängig.</a:t>
             </a:r>
             <a:endParaRPr lang="en-US" sz="2200" dirty="0"/>
           </a:p>
@@ -2873,7 +2873,7 @@
                 <a:ea typeface="Source Serif 4" pitchFamily="34" charset="-122"/>
                 <a:cs typeface="Source Serif 4" pitchFamily="34" charset="-120"/>
               </a:rPr>
-              <a:t>Rom-PM ist </a:t>
+              <a:t xml:space="preserve">Rom-PM ist </a:t>
             </a:r>
             <a:r>
               <a:rPr lang="en-US" sz="2200" b="1" dirty="0">
@@ -2895,7 +2895,7 @@
                 <a:ea typeface="Source Serif 4" pitchFamily="34" charset="-122"/>
                 <a:cs typeface="Source Serif 4" pitchFamily="34" charset="-120"/>
               </a:rPr>
-              <a:t> — nicht interpoliert, nicht aufgefüllt.</a:t>
+              <a:t xml:space="preserve"> — nicht interpoliert, nicht aufgefüllt.</a:t>
             </a:r>
             <a:endParaRPr lang="en-US" sz="2200" dirty="0"/>
           </a:p>
@@ -3012,7 +3012,7 @@
                 <a:ea typeface="Source Serif 4" pitchFamily="34" charset="-122"/>
                 <a:cs typeface="Source Serif 4" pitchFamily="34" charset="-120"/>
               </a:rPr>
-              <a:t>EEA-Historie und Open-Meteo-Live werden nie vermischt — </a:t>
+              <a:t xml:space="preserve">EEA-Historie und Open-Meteo-Live werden nie vermischt — </a:t>
             </a:r>
             <a:r>
               <a:rPr lang="en-US" sz="2200" b="1" dirty="0">
@@ -3073,7 +3073,7 @@
                 <a:ea typeface="Inter Tight" pitchFamily="34" charset="-122"/>
                 <a:cs typeface="Inter Tight" pitchFamily="34" charset="-120"/>
               </a:rPr>
-              <a:t>Hinweis: WHO-2021 sind </a:t>
+              <a:t xml:space="preserve">Hinweis: WHO-2021 sind </a:t>
             </a:r>
             <a:r>
               <a:rPr lang="en-US" sz="1100" b="1" i="1" dirty="0">
@@ -3095,7 +3095,7 @@
                 <a:ea typeface="Inter Tight" pitchFamily="34" charset="-122"/>
                 <a:cs typeface="Inter Tight" pitchFamily="34" charset="-120"/>
               </a:rPr>
-              <a:t>, keine EU-Grenzwerte. „Über WHO" heißt also </a:t>
+              <a:t xml:space="preserve">, keine EU-Grenzwerte. „Über WHO" heißt also </a:t>
             </a:r>
             <a:r>
               <a:rPr lang="en-US" sz="1100" b="1" i="1" dirty="0">
@@ -3117,7 +3117,7 @@
                 <a:ea typeface="Inter Tight" pitchFamily="34" charset="-122"/>
                 <a:cs typeface="Inter Tight" pitchFamily="34" charset="-120"/>
               </a:rPr>
-              <a:t> — nicht „illegal".</a:t>
+              <a:t xml:space="preserve"> — nicht „illegal".</a:t>
             </a:r>
             <a:endParaRPr lang="en-US" sz="1100" dirty="0"/>
           </a:p>
@@ -3584,7 +3584,7 @@
                 <a:ea typeface="Source Serif 4" pitchFamily="34" charset="-122"/>
                 <a:cs typeface="Source Serif 4" pitchFamily="34" charset="-120"/>
               </a:rPr>
-              <a:t>Überall </a:t>
+              <a:t xml:space="preserve">Überall </a:t>
             </a:r>
             <a:r>
               <a:rPr lang="en-US" sz="3100" b="1" dirty="0">
@@ -3617,7 +3617,7 @@
                 <a:ea typeface="Source Serif 4" pitchFamily="34" charset="-122"/>
                 <a:cs typeface="Source Serif 4" pitchFamily="34" charset="-120"/>
               </a:rPr>
-              <a:t> — Jahresmittel 15–25 µg/m³ statt WHO 10.</a:t>
+              <a:t xml:space="preserve"> — Jahresmittel 15–25 µg/m³ statt WHO 10.</a:t>
             </a:r>
             <a:endParaRPr lang="en-US" sz="3100" dirty="0"/>
           </a:p>
@@ -3710,7 +3710,7 @@
         <p:spPr>
           <a:xfrm>
             <a:off x="2667305" y="5857646"/>
-            <a:ext cx="14478610" cy="1000354"/>
+            <a:ext cx="15550000" cy="1000354"/>
           </a:xfrm>
           <a:prstGeom prst="rect">
             <a:avLst/>
@@ -3745,7 +3745,7 @@
                 <a:ea typeface="Source Serif 4" pitchFamily="34" charset="-122"/>
                 <a:cs typeface="Source Serif 4" pitchFamily="34" charset="-120"/>
               </a:rPr>
-              <a:t> — Rangfolge ist schadstoffabhängig, getrennt betrachten.</a:t>
+              <a:t xml:space="preserve"> — Rangfolge ist schadstoffabhängig, getrennt betrachten.</a:t>
             </a:r>
             <a:endParaRPr lang="en-US" sz="3100" dirty="0"/>
           </a:p>
@@ -3873,7 +3873,7 @@
                 <a:ea typeface="Source Serif 4" pitchFamily="34" charset="-122"/>
                 <a:cs typeface="Source Serif 4" pitchFamily="34" charset="-120"/>
               </a:rPr>
-              <a:t> — Bevölkerungsdichte ist kein Erklärungsfaktor (r = −0,23).</a:t>
+              <a:t xml:space="preserve"> — Bevölkerungsdichte ist kein Erklärungsfaktor (nicht robust: r = −0,23, ohne Paris −0,95).</a:t>
             </a:r>
             <a:endParaRPr lang="en-US" sz="3100" dirty="0"/>
           </a:p>
@@ -3960,7 +3960,7 @@
                 <a:effectLst/>
                 <a:latin typeface="-apple-system"/>
               </a:rPr>
-              <a:t> </a:t>
+              <a:t xml:space="preserve"> </a:t>
             </a:r>
             <a:r>
               <a:rPr lang="en-GB" sz="1600" b="1" i="0" dirty="0" err="1">
@@ -3981,7 +3981,7 @@
                 <a:latin typeface="Inter Tight" pitchFamily="34" charset="0"/>
                 <a:ea typeface="Inter Tight" pitchFamily="34" charset="-122"/>
               </a:rPr>
-              <a:t> - </a:t>
+              <a:t xml:space="preserve"> - </a:t>
             </a:r>
             <a:r>
               <a:rPr lang="en-GB" sz="1600" b="1" i="0" dirty="0" err="1">
@@ -4001,7 +4001,7 @@
                 <a:effectLst/>
                 <a:latin typeface="-apple-system"/>
               </a:rPr>
-              <a:t> Manuel</a:t>
+              <a:t xml:space="preserve"> Manuel</a:t>
             </a:r>
             <a:r>
               <a:rPr lang="en-US" sz="1500" b="1" i="0" dirty="0">
@@ -4012,7 +4012,7 @@
                 <a:latin typeface="Inter Tight" pitchFamily="34" charset="0"/>
                 <a:ea typeface="Inter Tight" pitchFamily="34" charset="-122"/>
               </a:rPr>
-              <a:t> – Wiesmüller Georg</a:t>
+              <a:t xml:space="preserve"> – Wiesmüller Georg</a:t>
             </a:r>
             <a:endParaRPr lang="en-US" sz="1500" b="1" dirty="0"/>
           </a:p>
@@ -4496,7 +4496,7 @@
                 <a:ea typeface="Source Serif 4" pitchFamily="34" charset="-122"/>
                 <a:cs typeface="Source Serif 4" pitchFamily="34" charset="-120"/>
               </a:rPr>
-              <a:t>Wie unterscheiden sich </a:t>
+              <a:t xml:space="preserve">Wie unterscheiden sich </a:t>
             </a:r>
             <a:r>
               <a:rPr lang="en-US" sz="2800" b="1" dirty="0">
@@ -4518,7 +4518,7 @@
                 <a:ea typeface="Source Serif 4" pitchFamily="34" charset="-122"/>
                 <a:cs typeface="Source Serif 4" pitchFamily="34" charset="-120"/>
               </a:rPr>
-              <a:t>, </a:t>
+              <a:t xml:space="preserve">, </a:t>
             </a:r>
             <a:r>
               <a:rPr lang="en-US" sz="2800" b="1" dirty="0">
@@ -4540,7 +4540,7 @@
                 <a:ea typeface="Source Serif 4" pitchFamily="34" charset="-122"/>
                 <a:cs typeface="Source Serif 4" pitchFamily="34" charset="-120"/>
               </a:rPr>
-              <a:t> und </a:t>
+              <a:t xml:space="preserve"> und </a:t>
             </a:r>
             <a:r>
               <a:rPr lang="en-US" sz="2800" b="1" dirty="0">
@@ -4573,7 +4573,7 @@
                 <a:ea typeface="Source Serif 4" pitchFamily="34" charset="-122"/>
                 <a:cs typeface="Source Serif 4" pitchFamily="34" charset="-120"/>
               </a:rPr>
-              <a:t> zwischen acht europäischen Hauptstädten — und wie ordnet man sie gesundheitlich ein?</a:t>
+              <a:t xml:space="preserve"> zwischen acht europäischen Hauptstädten — und wie ordnet man sie gesundheitlich ein?</a:t>
             </a:r>
             <a:endParaRPr lang="en-US" sz="2800" dirty="0"/>
           </a:p>
@@ -4612,7 +4612,7 @@
                 <a:ea typeface="Inter Tight" pitchFamily="34" charset="-122"/>
                 <a:cs typeface="Inter Tight" pitchFamily="34" charset="-120"/>
               </a:rPr>
-              <a:t>Datenjahr: vollständiges Kalenderjahr </a:t>
+              <a:t xml:space="preserve">Datenjahr: vollständiges Kalenderjahr </a:t>
             </a:r>
             <a:r>
               <a:rPr lang="en-US" sz="1300" b="1" dirty="0">
@@ -4634,7 +4634,7 @@
                 <a:ea typeface="Inter Tight" pitchFamily="34" charset="-122"/>
                 <a:cs typeface="Inter Tight" pitchFamily="34" charset="-120"/>
               </a:rPr>
-              <a:t> · Tagesauflösung · gemessene EEA-Werte</a:t>
+              <a:t xml:space="preserve"> · Tagesauflösung · gemessene EEA-Werte</a:t>
             </a:r>
             <a:endParaRPr lang="en-US" sz="1300" dirty="0"/>
           </a:p>
@@ -5077,7 +5077,7 @@
                 <a:ea typeface="Inter Tight" pitchFamily="34" charset="-122"/>
                 <a:cs typeface="Inter Tight" pitchFamily="34" charset="-120"/>
               </a:rPr>
-              <a:t>Gesundheits-Orientierung der WHO — </a:t>
+              <a:t xml:space="preserve">Gesundheits-Orientierung der WHO — </a:t>
             </a:r>
             <a:r>
               <a:rPr lang="en-US" sz="1100" b="1" i="1" dirty="0">
@@ -5099,7 +5099,7 @@
                 <a:ea typeface="Inter Tight" pitchFamily="34" charset="-122"/>
                 <a:cs typeface="Inter Tight" pitchFamily="34" charset="-120"/>
               </a:rPr>
-              <a:t> EU-Grenzwerte (NO</a:t>
+              <a:t xml:space="preserve"> EU-Grenzwerte (NO</a:t>
             </a:r>
             <a:r>
               <a:rPr lang="en-US" sz="900" i="1" dirty="0">
@@ -7234,7 +7234,7 @@
                 <a:ea typeface="Inter Tight" pitchFamily="34" charset="-122"/>
                 <a:cs typeface="Inter Tight" pitchFamily="34" charset="-120"/>
               </a:rPr>
-              <a:t> in </a:t>
+              <a:t xml:space="preserve"> in </a:t>
             </a:r>
             <a:r>
               <a:rPr lang="en-US" sz="1300" b="1" dirty="0">
@@ -7256,7 +7256,7 @@
                 <a:ea typeface="Inter Tight" pitchFamily="34" charset="-122"/>
                 <a:cs typeface="Inter Tight" pitchFamily="34" charset="-120"/>
               </a:rPr>
-              <a:t> — Spitzenreiter, das 2,5-fache des WHO-Werts.</a:t>
+              <a:t xml:space="preserve"> — Spitzenreiter, das 2,5-fache des WHO-Werts.</a:t>
             </a:r>
             <a:endParaRPr lang="en-US" sz="1300" dirty="0"/>
           </a:p>
@@ -7334,7 +7334,7 @@
                 <a:ea typeface="Inter Tight" pitchFamily="34" charset="-122"/>
                 <a:cs typeface="Inter Tight" pitchFamily="34" charset="-120"/>
               </a:rPr>
-              <a:t>Für </a:t>
+              <a:t xml:space="preserve">Für </a:t>
             </a:r>
             <a:r>
               <a:rPr lang="en-US" sz="1200" b="1" dirty="0">
@@ -7356,7 +7356,7 @@
                 <a:ea typeface="Inter Tight" pitchFamily="34" charset="-122"/>
                 <a:cs typeface="Inter Tight" pitchFamily="34" charset="-120"/>
               </a:rPr>
-              <a:t> liegen keine validierten PM-Werte vor. Die Lücke bleibt sichtbar — wir interpolieren nicht.</a:t>
+              <a:t xml:space="preserve"> liegen keine validierten PM-Werte vor. Die Lücke bleibt sichtbar — wir interpolieren nicht.</a:t>
             </a:r>
             <a:endParaRPr lang="en-US" sz="1200" dirty="0"/>
           </a:p>
@@ -8796,7 +8796,7 @@
                 <a:ea typeface="Source Serif 4" pitchFamily="34" charset="-122"/>
                 <a:cs typeface="Source Serif 4" pitchFamily="34" charset="-120"/>
               </a:rPr>
-              <a:t>9,6</a:t>
+              <a:t>9,5</a:t>
             </a:r>
             <a:endParaRPr lang="en-US" sz="1800" dirty="0"/>
           </a:p>
@@ -9096,7 +9096,7 @@
                 <a:ea typeface="Inter Tight" pitchFamily="34" charset="-122"/>
                 <a:cs typeface="Inter Tight" pitchFamily="34" charset="-120"/>
               </a:rPr>
-              <a:t>Fehlerbalken = Standardabweichung der Tageswerte. Benachbarte Städte (z. B. Berlin/Paris, Wien/Amsterdam/Madrid) sind </a:t>
+              <a:t xml:space="preserve">Fehlerbalken = Standardabweichung der Tageswerte. Benachbarte Städte (z. B. Berlin/Paris, Wien/Amsterdam/Madrid) sind </a:t>
             </a:r>
             <a:r>
               <a:rPr lang="en-US" sz="1100" b="1" i="1" dirty="0">
@@ -9118,7 +9118,7 @@
                 <a:ea typeface="Inter Tight" pitchFamily="34" charset="-122"/>
                 <a:cs typeface="Inter Tight" pitchFamily="34" charset="-120"/>
               </a:rPr>
-              <a:t> unterscheidbar.</a:t>
+              <a:t xml:space="preserve"> unterscheidbar.</a:t>
             </a:r>
             <a:endParaRPr lang="en-US" sz="1100" dirty="0"/>
           </a:p>
@@ -9694,7 +9694,7 @@
                 <a:ea typeface="Inter Tight" pitchFamily="34" charset="-122"/>
                 <a:cs typeface="Inter Tight" pitchFamily="34" charset="-120"/>
               </a:rPr>
-              <a:t> = mittlere 50 % der Tage</a:t>
+              <a:t xml:space="preserve"> = mittlere 50 % der Tage</a:t>
             </a:r>
             <a:endParaRPr lang="en-US" sz="1200" dirty="0"/>
           </a:p>
@@ -9810,7 +9810,7 @@
                 <a:ea typeface="Inter Tight" pitchFamily="34" charset="-122"/>
                 <a:cs typeface="Inter Tight" pitchFamily="34" charset="-120"/>
               </a:rPr>
-              <a:t> = Median (mittlerer Tageswert)</a:t>
+              <a:t xml:space="preserve"> = Median (mittlerer Tageswert)</a:t>
             </a:r>
             <a:endParaRPr lang="en-US" sz="1200" dirty="0"/>
           </a:p>
@@ -9926,7 +9926,7 @@
                 <a:ea typeface="Inter Tight" pitchFamily="34" charset="-122"/>
                 <a:cs typeface="Inter Tight" pitchFamily="34" charset="-120"/>
               </a:rPr>
-              <a:t> = einzelne Ausreißer-Tage</a:t>
+              <a:t xml:space="preserve"> = einzelne Ausreißer-Tage</a:t>
             </a:r>
             <a:endParaRPr lang="en-US" sz="1200" dirty="0"/>
           </a:p>
@@ -10003,7 +10003,7 @@
                 <a:ea typeface="Inter Tight" pitchFamily="34" charset="-122"/>
                 <a:cs typeface="Inter Tight" pitchFamily="34" charset="-120"/>
               </a:rPr>
-              <a:t> = WHO-Jahresrichtwert</a:t>
+              <a:t xml:space="preserve"> = WHO-Jahresrichtwert</a:t>
             </a:r>
             <a:endParaRPr lang="en-US" sz="1200" dirty="0"/>
           </a:p>
@@ -10081,7 +10081,7 @@
                 <a:ea typeface="Source Serif 4" pitchFamily="34" charset="-122"/>
                 <a:cs typeface="Source Serif 4" pitchFamily="34" charset="-120"/>
               </a:rPr>
-              <a:t>PM10-Tageswerte erreichen </a:t>
+              <a:t xml:space="preserve">PM10-Tageswerte erreichen </a:t>
             </a:r>
             <a:r>
               <a:rPr lang="en-US" sz="1600" b="1" dirty="0">
@@ -10103,7 +10103,7 @@
                 <a:ea typeface="Source Serif 4" pitchFamily="34" charset="-122"/>
                 <a:cs typeface="Source Serif 4" pitchFamily="34" charset="-120"/>
               </a:rPr>
-              <a:t> — der WHO-Tagesrichtwert ist nochmals strenger als der Jahres­wert.</a:t>
+              <a:t xml:space="preserve"> — der WHO-Tagesrichtwert ist nochmals strenger als der Jahres­wert.</a:t>
             </a:r>
             <a:endParaRPr lang="en-US" sz="1600" dirty="0"/>
           </a:p>
@@ -10574,7 +10574,7 @@
                 <a:ea typeface="Inter Tight" pitchFamily="34" charset="-122"/>
                 <a:cs typeface="Inter Tight" pitchFamily="34" charset="-120"/>
               </a:rPr>
-              <a:t>Im </a:t>
+              <a:t xml:space="preserve">Im </a:t>
             </a:r>
             <a:r>
               <a:rPr lang="en-US" sz="1400" b="1" dirty="0">
@@ -10596,7 +10596,7 @@
                 <a:ea typeface="Inter Tight" pitchFamily="34" charset="-122"/>
                 <a:cs typeface="Inter Tight" pitchFamily="34" charset="-120"/>
               </a:rPr>
-              <a:t> Spitzenwerte von 40–48 µg/m³ — fast das Zehnfache des WHO-Werts. Im </a:t>
+              <a:t xml:space="preserve"> Spitzenwerte von 40–48 µg/m³ — fast das Zehnfache des WHO-Werts. Im </a:t>
             </a:r>
             <a:r>
               <a:rPr lang="en-US" sz="1400" b="1" dirty="0">
@@ -10618,7 +10618,7 @@
                 <a:ea typeface="Inter Tight" pitchFamily="34" charset="-122"/>
                 <a:cs typeface="Inter Tight" pitchFamily="34" charset="-120"/>
               </a:rPr>
-              <a:t> deutlich niedriger, häufig nahe oder unter 10 µg/m³.</a:t>
+              <a:t xml:space="preserve"> deutlich niedriger, häufig nahe oder unter 10 µg/m³.</a:t>
             </a:r>
             <a:endParaRPr lang="en-US" sz="1400" dirty="0"/>
           </a:p>
@@ -10773,7 +10773,7 @@
                 <a:ea typeface="Inter Tight" pitchFamily="34" charset="-122"/>
                 <a:cs typeface="Inter Tight" pitchFamily="34" charset="-120"/>
               </a:rPr>
-              <a:t> in der kalten Jahres­zeit setzt mehr Feinstaub frei.</a:t>
+              <a:t xml:space="preserve"> in der kalten Jahres­zeit setzt mehr Feinstaub frei.</a:t>
             </a:r>
             <a:endParaRPr lang="en-US" sz="1200" dirty="0"/>
           </a:p>
@@ -10889,7 +10889,7 @@
                 <a:ea typeface="Inter Tight" pitchFamily="34" charset="-122"/>
                 <a:cs typeface="Inter Tight" pitchFamily="34" charset="-120"/>
               </a:rPr>
-              <a:t> halten Schadstoffe am Boden.</a:t>
+              <a:t xml:space="preserve"> halten Schadstoffe am Boden.</a:t>
             </a:r>
             <a:endParaRPr lang="en-US" sz="1200" dirty="0"/>
           </a:p>
@@ -10967,7 +10967,7 @@
                 <a:ea typeface="Inter Tight" pitchFamily="34" charset="-122"/>
                 <a:cs typeface="Inter Tight" pitchFamily="34" charset="-120"/>
               </a:rPr>
-              <a:t>Lücken bleiben Lücken — </a:t>
+              <a:t xml:space="preserve">Lücken bleiben Lücken — </a:t>
             </a:r>
             <a:r>
               <a:rPr lang="en-US" sz="1200" b="1" dirty="0">
@@ -11433,7 +11433,7 @@
                 <a:ea typeface="Source Serif 4" pitchFamily="34" charset="-122"/>
                 <a:cs typeface="Source Serif 4" pitchFamily="34" charset="-120"/>
               </a:rPr>
-              <a:t>Explorativ verknüpft: Bevölkerungsdichte (Wikipedia) vs. PM2.5 (EEA). Kein klarer Zusammenhang.</a:t>
+              <a:t>Explorativ verknüpft: Bevölkerungsdichte (Wikipedia) vs. PM2.5 (EEA) — der Zusammenhang ist nicht robust.</a:t>
             </a:r>
             <a:endParaRPr lang="en-US" sz="2100" dirty="0"/>
           </a:p>
@@ -11550,7 +11550,7 @@
                 <a:ea typeface="Inter Tight" pitchFamily="34" charset="-122"/>
                 <a:cs typeface="Inter Tight" pitchFamily="34" charset="-120"/>
               </a:rPr>
-              <a:t>n = 7 (Rom ohne PM-Daten). </a:t>
+              <a:t xml:space="preserve">n = 7. Ohne das nicht vergleichbare Paris steigt r auf </a:t>
             </a:r>
             <a:r>
               <a:rPr lang="en-US" sz="1200" b="1" dirty="0">
@@ -11561,7 +11561,7 @@
                 <a:ea typeface="Inter Tight" pitchFamily="34" charset="-122"/>
                 <a:cs typeface="Inter Tight" pitchFamily="34" charset="-120"/>
               </a:rPr>
-              <a:t>Schwach negativ, kein klarer Trend</a:t>
+              <a:t>−0,95</a:t>
             </a:r>
             <a:r>
               <a:rPr lang="en-US" sz="1200" dirty="0">
@@ -11572,7 +11572,7 @@
                 <a:ea typeface="Inter Tight" pitchFamily="34" charset="-122"/>
                 <a:cs typeface="Inter Tight" pitchFamily="34" charset="-120"/>
               </a:rPr>
-              <a:t> — explorativ, kein Signifikanztest.</a:t>
+              <a:t xml:space="preserve"> — nicht robust, rein explorativ.</a:t>
             </a:r>
             <a:endParaRPr lang="en-US" sz="1200" dirty="0"/>
           </a:p>
@@ -11611,7 +11611,7 @@
                 <a:ea typeface="JetBrains Mono" pitchFamily="34" charset="-122"/>
                 <a:cs typeface="JetBrains Mono" pitchFamily="34" charset="-120"/>
               </a:rPr>
-              <a:t>Gegenbeispiel</a:t>
+              <a:t>Sonderfall Paris</a:t>
             </a:r>
             <a:endParaRPr lang="en-US" sz="900" dirty="0"/>
           </a:p>
@@ -11661,7 +11661,7 @@
                 <a:ea typeface="Inter Tight" pitchFamily="34" charset="-122"/>
                 <a:cs typeface="Inter Tight" pitchFamily="34" charset="-120"/>
               </a:rPr>
-              <a:t> ist mit ~19 430 Einw./km² extrem dicht — bei PM2.5 aber nur mittig (11,1 µg/m³).</a:t>
+              <a:t xml:space="preserve"> ist Kernkommune (~105 km²) — mit den anderen Städten nicht direkt vergleichbar (MAUP).</a:t>
             </a:r>
             <a:endParaRPr lang="en-US" sz="1200" dirty="0"/>
           </a:p>
@@ -11700,7 +11700,7 @@
                 <a:ea typeface="Inter Tight" pitchFamily="34" charset="-122"/>
                 <a:cs typeface="Inter Tight" pitchFamily="34" charset="-120"/>
               </a:rPr>
-              <a:t>Beleg, dass zwei Quellen (Scraping + EEA) sinnvoll verknüpft wurden — </a:t>
+              <a:t xml:space="preserve">Zwei Quellen (Scraping + EEA) verknüpft — Paris gesondert markiert, </a:t>
             </a:r>
             <a:r>
               <a:rPr lang="en-US" sz="1000" b="1" i="1" dirty="0">
@@ -11722,7 +11722,7 @@
                 <a:ea typeface="Inter Tight" pitchFamily="34" charset="-122"/>
                 <a:cs typeface="Inter Tight" pitchFamily="34" charset="-120"/>
               </a:rPr>
-              <a:t> Kausalbehauptung.</a:t>
+              <a:t xml:space="preserve"> Kausalbehauptung.</a:t>
             </a:r>
             <a:endParaRPr lang="en-US" sz="1000" dirty="0"/>
           </a:p>
@@ -12143,7 +12143,7 @@
                 <a:ea typeface="Source Serif 4" pitchFamily="34" charset="-122"/>
                 <a:cs typeface="Source Serif 4" pitchFamily="34" charset="-120"/>
               </a:rPr>
-              <a:t>192 aktuelle Stundenwerte von Open-Meteo via Kafka → Spark. Bewusst </a:t>
+              <a:t xml:space="preserve">192 aktuelle Stundenwerte von Open-Meteo via Kafka → Spark. Bewusst </a:t>
             </a:r>
             <a:r>
               <a:rPr lang="en-US" sz="2100" b="1" i="1" dirty="0">
@@ -12165,7 +12165,7 @@
                 <a:ea typeface="Source Serif 4" pitchFamily="34" charset="-122"/>
                 <a:cs typeface="Source Serif 4" pitchFamily="34" charset="-120"/>
               </a:rPr>
-              <a:t> von der historischen Messanalyse.</a:t>
+              <a:t xml:space="preserve"> von der historischen Messanalyse.</a:t>
             </a:r>
             <a:endParaRPr lang="en-US" sz="2100" dirty="0"/>
           </a:p>
@@ -13040,7 +13040,7 @@
                 <a:ea typeface="Inter Tight" pitchFamily="34" charset="-122"/>
                 <a:cs typeface="Inter Tight" pitchFamily="34" charset="-120"/>
               </a:rPr>
-              <a:t> Open-Meteo liefert </a:t>
+              <a:t xml:space="preserve"> Open-Meteo liefert </a:t>
             </a:r>
             <a:r>
               <a:rPr lang="en-US" sz="1200" b="1" dirty="0">
@@ -13062,7 +13062,7 @@
                 <a:ea typeface="Inter Tight" pitchFamily="34" charset="-122"/>
                 <a:cs typeface="Inter Tight" pitchFamily="34" charset="-120"/>
               </a:rPr>
-              <a:t> — keine validierten EEA-Messungen. Deshalb bewusst </a:t>
+              <a:t xml:space="preserve"> — keine validierten EEA-Messungen. Deshalb bewusst </a:t>
             </a:r>
             <a:r>
               <a:rPr lang="en-US" sz="1200" b="1" dirty="0">
@@ -13084,7 +13084,7 @@
                 <a:ea typeface="Inter Tight" pitchFamily="34" charset="-122"/>
                 <a:cs typeface="Inter Tight" pitchFamily="34" charset="-120"/>
               </a:rPr>
-              <a:t> gegen die WHO-Jahreswerte gestellt.</a:t>
+              <a:t xml:space="preserve"> gegen die WHO-Jahreswerte gestellt.</a:t>
             </a:r>
             <a:endParaRPr lang="en-US" sz="1200" dirty="0"/>
           </a:p>
@@ -13123,7 +13123,7 @@
                 <a:ea typeface="JetBrains Mono" pitchFamily="34" charset="-122"/>
                 <a:cs typeface="JetBrains Mono" pitchFamily="34" charset="-120"/>
               </a:rPr>
-              <a:t>Quelle: Open-Meteo · Stand 2026-06-18 23:00 UTC</a:t>
+              <a:t>Quelle: Open-Meteo · Stand 2026-06-29 23:00 UTC</a:t>
             </a:r>
             <a:endParaRPr lang="en-US" sz="900" dirty="0"/>
           </a:p>
